--- a/workshops/session6-transformer.pptx
+++ b/workshops/session6-transformer.pptx
@@ -510,7 +510,8 @@
           <a:p>
             <a:r>
               <a:rPr lang="en-US" dirty="0"/>
-              <a:t/>
+              <a:t>Transformer: معماری پشت همهٔ LLMهای مدرن.
+سؤال شروع: «ChatGPT چطور همهٔ جمله را هم‌زمان می‌فهمد؟»</a:t>
             </a:r>
             <a:endParaRPr lang="en-US" dirty="0"/>
           </a:p>
@@ -598,7 +599,7 @@
           <a:p>
             <a:r>
               <a:rPr lang="en-US" dirty="0"/>
-              <a:t/>
+              <a:t>مرور: شبکهٔ عصبی = لایه‌هایی از نورون‌ها با پارامترها.</a:t>
             </a:r>
             <a:endParaRPr lang="en-US" dirty="0"/>
           </a:p>
@@ -686,7 +687,8 @@
           <a:p>
             <a:r>
               <a:rPr lang="en-US" dirty="0"/>
-              <a:t/>
+              <a:t>تصویر rnn-challenges.png را نشان دهید.
+توضیح: مدل‌های قدیمی مثل کسی بودند که کتاب را کلمه‌به‌کلمه می‌خواند و هر بار فقط یک کلمه را می‌فهمد.</a:t>
             </a:r>
             <a:endParaRPr lang="en-US" dirty="0"/>
           </a:p>
@@ -774,7 +776,8 @@
           <a:p>
             <a:r>
               <a:rPr lang="en-US" dirty="0"/>
-              <a:t/>
+              <a:t>Transformer = تبدیل‌کننده.
+مثل کسی که کتاب را یک‌باره می‌خواند و همهٔ کلمات را هم‌زمان می‌فهمد.</a:t>
             </a:r>
             <a:endParaRPr lang="en-US" dirty="0"/>
           </a:p>
@@ -862,7 +865,9 @@
           <a:p>
             <a:r>
               <a:rPr lang="en-US" dirty="0"/>
-              <a:t/>
+              <a:t>تصویر word-embedding.png را نشان دهید.
+مثال: «گربه» ← [۰٫۲، ۰٫۸، ۰٫۱، ...]
+«شیر» در سه زمینه: حیوان، وسیله، نوشیدنی.</a:t>
             </a:r>
             <a:endParaRPr lang="en-US" dirty="0"/>
           </a:p>
@@ -950,7 +955,8 @@
           <a:p>
             <a:r>
               <a:rPr lang="en-US" dirty="0"/>
-              <a:t/>
+              <a:t>تصویر self-attention.png را نشان دهید.
+مثال دقیق: در جملهٔ «علی به بانک رفت چون او پول لازم داشت»، برای ساختن معنای «او» مدل به هر کلمه یک امتیاز توجه می‌دهد: علی ۷۰٪، پول ۵٪، بانک ۵٪، بقیهٔ کلمات مجموعاً ۲۰٪.</a:t>
             </a:r>
             <a:endParaRPr lang="en-US" dirty="0"/>
           </a:p>
@@ -1038,7 +1044,13 @@
           <a:p>
             <a:r>
               <a:rPr lang="en-US" dirty="0"/>
-              <a:t/>
+              <a:t>مثال کارشته (روایت کامل علی و او):
+جمله: «علی به بانک رفت چون او پول لازم داشت.» ← ۹ توکن
+گام ۱: هر توکن یک بردار عددی مستقل دارد.
+گام ۲: برای «او»، مدل به هر کلمه امتیاز توجه می‌دهد: علی ۷۰٪، پول ۵٪، بانک ۵٪، بقیه ۲۰٪.
+گام ۳: همین کار برای همهٔ ۹ توکن انجام می‌شود ← ماتریس ۹×۹.
+گام ۴: مدل از این ماتریس ۹ بردار جدید می‌سازد (contextualized).
+گام ۵: لایهٔ بعدی همین کار را روی بردارهای زمینه‌دار تکرار می‌کند.</a:t>
             </a:r>
             <a:endParaRPr lang="en-US" dirty="0"/>
           </a:p>
@@ -1126,7 +1138,9 @@
           <a:p>
             <a:r>
               <a:rPr lang="en-US" dirty="0"/>
-              <a:t/>
+              <a:t>قیاس میزگرد: مثل جلسه‌ای که هر نفر (کلمه) می‌پرسد «برای فهم نقشم به حرف چه کسانی گوش بدهم؟»
+هر کس به همان افراد مرتبط‌تر بیشتر گوش می‌دهد.
+این گفت‌وگو چند دور تکرار می‌شود تا درک همه از موضوع عمیق شود.</a:t>
             </a:r>
             <a:endParaRPr lang="en-US" dirty="0"/>
           </a:p>
@@ -1214,7 +1228,8 @@
           <a:p>
             <a:r>
               <a:rPr lang="en-US" dirty="0"/>
-              <a:t/>
+              <a:t>جملهٔ کلیدی برای شرکت‌کنندگان:
+«مدل موقتاً روابط همهٔ جفت‌ها را می‌سازد، بعد از آن‌ها برای ساختن نمایش جدید هر کلمه استفاده می‌کند — و این فرایند در هر لایه دوباره اتفاق می‌افتد.»</a:t>
             </a:r>
             <a:endParaRPr lang="en-US" dirty="0"/>
           </a:p>
@@ -1965,7 +1980,7 @@
       </p:sp>
       <p:sp>
         <p:nvSpPr>
-          <p:cNvPr id="5" name="Text 3"/>
+          <p:cNvPr id="6" name="Text 3"/>
           <p:cNvSpPr/>
           <p:nvPr/>
         </p:nvSpPr>
@@ -2004,7 +2019,7 @@
       </p:sp>
       <p:sp>
         <p:nvSpPr>
-          <p:cNvPr id="6" name="Text 4"/>
+          <p:cNvPr id="7" name="Text 4"/>
           <p:cNvSpPr/>
           <p:nvPr/>
         </p:nvSpPr>
@@ -2285,7 +2300,7 @@
       </p:sp>
       <p:sp>
         <p:nvSpPr>
-          <p:cNvPr id="7" name="Text 4"/>
+          <p:cNvPr id="8" name="Text 4"/>
           <p:cNvSpPr/>
           <p:nvPr/>
         </p:nvSpPr>
@@ -2324,7 +2339,7 @@
       </p:sp>
       <p:sp>
         <p:nvSpPr>
-          <p:cNvPr id="8" name="Text 5"/>
+          <p:cNvPr id="9" name="Text 5"/>
           <p:cNvSpPr/>
           <p:nvPr/>
         </p:nvSpPr>
@@ -2838,7 +2853,7 @@
       </p:sp>
       <p:sp>
         <p:nvSpPr>
-          <p:cNvPr id="16" name="Text 14"/>
+          <p:cNvPr id="17" name="Text 14"/>
           <p:cNvSpPr/>
           <p:nvPr/>
         </p:nvSpPr>
@@ -2877,7 +2892,7 @@
       </p:sp>
       <p:sp>
         <p:nvSpPr>
-          <p:cNvPr id="17" name="Text 15"/>
+          <p:cNvPr id="18" name="Text 15"/>
           <p:cNvSpPr/>
           <p:nvPr/>
         </p:nvSpPr>
@@ -3179,7 +3194,7 @@
       </p:sp>
       <p:sp>
         <p:nvSpPr>
-          <p:cNvPr id="7" name="Text 4"/>
+          <p:cNvPr id="8" name="Text 4"/>
           <p:cNvSpPr/>
           <p:nvPr/>
         </p:nvSpPr>
@@ -3218,7 +3233,7 @@
       </p:sp>
       <p:sp>
         <p:nvSpPr>
-          <p:cNvPr id="8" name="Text 5"/>
+          <p:cNvPr id="9" name="Text 5"/>
           <p:cNvSpPr/>
           <p:nvPr/>
         </p:nvSpPr>
@@ -3499,7 +3514,7 @@
       </p:sp>
       <p:sp>
         <p:nvSpPr>
-          <p:cNvPr id="7" name="Text 4"/>
+          <p:cNvPr id="8" name="Text 4"/>
           <p:cNvSpPr/>
           <p:nvPr/>
         </p:nvSpPr>
@@ -3538,7 +3553,7 @@
       </p:sp>
       <p:sp>
         <p:nvSpPr>
-          <p:cNvPr id="8" name="Text 5"/>
+          <p:cNvPr id="9" name="Text 5"/>
           <p:cNvSpPr/>
           <p:nvPr/>
         </p:nvSpPr>
@@ -4497,7 +4512,7 @@
       </p:sp>
       <p:sp>
         <p:nvSpPr>
-          <p:cNvPr id="6" name="Text 3"/>
+          <p:cNvPr id="7" name="Text 3"/>
           <p:cNvSpPr/>
           <p:nvPr/>
         </p:nvSpPr>
@@ -4536,7 +4551,7 @@
       </p:sp>
       <p:sp>
         <p:nvSpPr>
-          <p:cNvPr id="7" name="Text 4"/>
+          <p:cNvPr id="8" name="Text 4"/>
           <p:cNvSpPr/>
           <p:nvPr/>
         </p:nvSpPr>
@@ -4775,7 +4790,7 @@
       </p:sp>
       <p:sp>
         <p:nvSpPr>
-          <p:cNvPr id="5" name="Text 3"/>
+          <p:cNvPr id="6" name="Text 3"/>
           <p:cNvSpPr/>
           <p:nvPr/>
         </p:nvSpPr>
@@ -4814,7 +4829,7 @@
       </p:sp>
       <p:sp>
         <p:nvSpPr>
-          <p:cNvPr id="6" name="Text 4"/>
+          <p:cNvPr id="7" name="Text 4"/>
           <p:cNvSpPr/>
           <p:nvPr/>
         </p:nvSpPr>
@@ -5053,7 +5068,7 @@
       </p:sp>
       <p:sp>
         <p:nvSpPr>
-          <p:cNvPr id="5" name="Text 3"/>
+          <p:cNvPr id="6" name="Text 3"/>
           <p:cNvSpPr/>
           <p:nvPr/>
         </p:nvSpPr>
@@ -5092,7 +5107,7 @@
       </p:sp>
       <p:sp>
         <p:nvSpPr>
-          <p:cNvPr id="6" name="Text 4"/>
+          <p:cNvPr id="7" name="Text 4"/>
           <p:cNvSpPr/>
           <p:nvPr/>
         </p:nvSpPr>
